--- a/capacitaciones/prospeccion/Prospeccion.pptx
+++ b/capacitaciones/prospeccion/Prospeccion.pptx
@@ -1825,9 +1825,9 @@
                 <a:solidFill>
                   <a:srgbClr val="FFFFFF"/>
                 </a:solidFill>
-                <a:latin typeface="Arial" pitchFamily="34" charset="0"/>
-                <a:ea typeface="Arial" pitchFamily="34" charset="-122"/>
-                <a:cs typeface="Arial" pitchFamily="34" charset="-120"/>
+                <a:latin typeface="Inter" pitchFamily="34" charset="0"/>
+                <a:ea typeface="Inter" pitchFamily="34" charset="-122"/>
+                <a:cs typeface="Inter" pitchFamily="34" charset="-120"/>
               </a:rPr>
               <a:t>Capacitaciones Krak Real Estate</a:t>
             </a:r>
@@ -1867,9 +1867,9 @@
                 <a:solidFill>
                   <a:srgbClr val="FFFFFF"/>
                 </a:solidFill>
-                <a:latin typeface="Arial" pitchFamily="34" charset="0"/>
-                <a:ea typeface="Arial" pitchFamily="34" charset="-122"/>
-                <a:cs typeface="Arial" pitchFamily="34" charset="-120"/>
+                <a:latin typeface="Inter" pitchFamily="34" charset="0"/>
+                <a:ea typeface="Inter" pitchFamily="34" charset="-122"/>
+                <a:cs typeface="Inter" pitchFamily="34" charset="-120"/>
               </a:rPr>
               <a:t>Prospección</a:t>
             </a:r>
@@ -1906,9 +1906,9 @@
                 <a:solidFill>
                   <a:srgbClr val="D9E4F0"/>
                 </a:solidFill>
-                <a:latin typeface="Arial" pitchFamily="34" charset="0"/>
-                <a:ea typeface="Arial" pitchFamily="34" charset="-122"/>
-                <a:cs typeface="Arial" pitchFamily="34" charset="-120"/>
+                <a:latin typeface="Inter" pitchFamily="34" charset="0"/>
+                <a:ea typeface="Inter" pitchFamily="34" charset="-122"/>
+                <a:cs typeface="Inter" pitchFamily="34" charset="-120"/>
               </a:rPr>
               <a:t>El primer eslabón del proceso de captación.</a:t>
             </a:r>
@@ -2058,9 +2058,9 @@
                 <a:solidFill>
                   <a:srgbClr val="08407C"/>
                 </a:solidFill>
-                <a:latin typeface="Arial" pitchFamily="34" charset="0"/>
-                <a:ea typeface="Arial" pitchFamily="34" charset="-122"/>
-                <a:cs typeface="Arial" pitchFamily="34" charset="-120"/>
+                <a:latin typeface="Inter" pitchFamily="34" charset="0"/>
+                <a:ea typeface="Inter" pitchFamily="34" charset="-122"/>
+                <a:cs typeface="Inter" pitchFamily="34" charset="-120"/>
               </a:rPr>
               <a:t>Conclusión final</a:t>
             </a:r>
@@ -2097,9 +2097,9 @@
                 <a:solidFill>
                   <a:srgbClr val="6A7686"/>
                 </a:solidFill>
-                <a:latin typeface="Arial" pitchFamily="34" charset="0"/>
-                <a:ea typeface="Arial" pitchFamily="34" charset="-122"/>
-                <a:cs typeface="Arial" pitchFamily="34" charset="-120"/>
+                <a:latin typeface="Inter" pitchFamily="34" charset="0"/>
+                <a:ea typeface="Inter" pitchFamily="34" charset="-122"/>
+                <a:cs typeface="Inter" pitchFamily="34" charset="-120"/>
               </a:rPr>
               <a:t>La importancia de la prospección.</a:t>
             </a:r>
@@ -2166,9 +2166,9 @@
                 <a:solidFill>
                   <a:srgbClr val="FFFFFF"/>
                 </a:solidFill>
-                <a:latin typeface="Arial" pitchFamily="34" charset="0"/>
-                <a:ea typeface="Arial" pitchFamily="34" charset="-122"/>
-                <a:cs typeface="Arial" pitchFamily="34" charset="-120"/>
+                <a:latin typeface="Inter" pitchFamily="34" charset="0"/>
+                <a:ea typeface="Inter" pitchFamily="34" charset="-122"/>
+                <a:cs typeface="Inter" pitchFamily="34" charset="-120"/>
               </a:rPr>
               <a:t>Si sistematizamos el proceso de venta y la propiedad está bien tasada, sin dudas se va a vender.</a:t>
             </a:r>
@@ -2235,9 +2235,9 @@
                 <a:solidFill>
                   <a:srgbClr val="FFFFFF"/>
                 </a:solidFill>
-                <a:latin typeface="Arial" pitchFamily="34" charset="0"/>
-                <a:ea typeface="Arial" pitchFamily="34" charset="-122"/>
-                <a:cs typeface="Arial" pitchFamily="34" charset="-120"/>
+                <a:latin typeface="Inter" pitchFamily="34" charset="0"/>
+                <a:ea typeface="Inter" pitchFamily="34" charset="-122"/>
+                <a:cs typeface="Inter" pitchFamily="34" charset="-120"/>
               </a:rPr>
               <a:t>El desafío es seguir alimentando ese proceso con prospecciones. Es lo que marca la diferencia entre los agentes buenos y los muy buenos.</a:t>
             </a:r>
@@ -2337,9 +2337,9 @@
                 <a:solidFill>
                   <a:srgbClr val="08407C"/>
                 </a:solidFill>
-                <a:latin typeface="Arial" pitchFamily="34" charset="0"/>
-                <a:ea typeface="Arial" pitchFamily="34" charset="-122"/>
-                <a:cs typeface="Arial" pitchFamily="34" charset="-120"/>
+                <a:latin typeface="Inter" pitchFamily="34" charset="0"/>
+                <a:ea typeface="Inter" pitchFamily="34" charset="-122"/>
+                <a:cs typeface="Inter" pitchFamily="34" charset="-120"/>
               </a:rPr>
               <a:t>Muchas gracias.</a:t>
             </a:r>
@@ -2376,9 +2376,9 @@
                 <a:solidFill>
                   <a:srgbClr val="4E586E"/>
                 </a:solidFill>
-                <a:latin typeface="Arial" pitchFamily="34" charset="0"/>
-                <a:ea typeface="Arial" pitchFamily="34" charset="-122"/>
-                <a:cs typeface="Arial" pitchFamily="34" charset="-120"/>
+                <a:latin typeface="Inter" pitchFamily="34" charset="0"/>
+                <a:ea typeface="Inter" pitchFamily="34" charset="-122"/>
+                <a:cs typeface="Inter" pitchFamily="34" charset="-120"/>
               </a:rPr>
               <a:t>Sin prospectos no hay oportunidades, y sin oportunidades no hay cierres.</a:t>
             </a:r>
@@ -2415,9 +2415,9 @@
                 <a:solidFill>
                   <a:srgbClr val="6A7686"/>
                 </a:solidFill>
-                <a:latin typeface="Arial" pitchFamily="34" charset="0"/>
-                <a:ea typeface="Arial" pitchFamily="34" charset="-122"/>
-                <a:cs typeface="Arial" pitchFamily="34" charset="-120"/>
+                <a:latin typeface="Inter" pitchFamily="34" charset="0"/>
+                <a:ea typeface="Inter" pitchFamily="34" charset="-122"/>
+                <a:cs typeface="Inter" pitchFamily="34" charset="-120"/>
               </a:rPr>
               <a:t>Capacitaciones Krak Real Estate</a:t>
             </a:r>
@@ -2567,9 +2567,9 @@
                 <a:solidFill>
                   <a:srgbClr val="08407C"/>
                 </a:solidFill>
-                <a:latin typeface="Arial" pitchFamily="34" charset="0"/>
-                <a:ea typeface="Arial" pitchFamily="34" charset="-122"/>
-                <a:cs typeface="Arial" pitchFamily="34" charset="-120"/>
+                <a:latin typeface="Inter" pitchFamily="34" charset="0"/>
+                <a:ea typeface="Inter" pitchFamily="34" charset="-122"/>
+                <a:cs typeface="Inter" pitchFamily="34" charset="-120"/>
               </a:rPr>
               <a:t>Proceso de captación</a:t>
             </a:r>
@@ -2606,9 +2606,9 @@
                 <a:solidFill>
                   <a:srgbClr val="6A7686"/>
                 </a:solidFill>
-                <a:latin typeface="Arial" pitchFamily="34" charset="0"/>
-                <a:ea typeface="Arial" pitchFamily="34" charset="-122"/>
-                <a:cs typeface="Arial" pitchFamily="34" charset="-120"/>
+                <a:latin typeface="Inter" pitchFamily="34" charset="0"/>
+                <a:ea typeface="Inter" pitchFamily="34" charset="-122"/>
+                <a:cs typeface="Inter" pitchFamily="34" charset="-120"/>
               </a:rPr>
               <a:t>Un embudo de tres pasos.</a:t>
             </a:r>
@@ -2673,9 +2673,9 @@
                 <a:solidFill>
                   <a:srgbClr val="FFFFFF"/>
                 </a:solidFill>
-                <a:latin typeface="Arial" pitchFamily="34" charset="0"/>
-                <a:ea typeface="Arial" pitchFamily="34" charset="-122"/>
-                <a:cs typeface="Arial" pitchFamily="34" charset="-120"/>
+                <a:latin typeface="Inter" pitchFamily="34" charset="0"/>
+                <a:ea typeface="Inter" pitchFamily="34" charset="-122"/>
+                <a:cs typeface="Inter" pitchFamily="34" charset="-120"/>
               </a:rPr>
               <a:t>Prospección</a:t>
             </a:r>
@@ -2740,9 +2740,9 @@
                 <a:solidFill>
                   <a:srgbClr val="FFFFFF"/>
                 </a:solidFill>
-                <a:latin typeface="Arial" pitchFamily="34" charset="0"/>
-                <a:ea typeface="Arial" pitchFamily="34" charset="-122"/>
-                <a:cs typeface="Arial" pitchFamily="34" charset="-120"/>
+                <a:latin typeface="Inter" pitchFamily="34" charset="0"/>
+                <a:ea typeface="Inter" pitchFamily="34" charset="-122"/>
+                <a:cs typeface="Inter" pitchFamily="34" charset="-120"/>
               </a:rPr>
               <a:t>Tasación</a:t>
             </a:r>
@@ -2807,9 +2807,9 @@
                 <a:solidFill>
                   <a:srgbClr val="FFFFFF"/>
                 </a:solidFill>
-                <a:latin typeface="Arial" pitchFamily="34" charset="0"/>
-                <a:ea typeface="Arial" pitchFamily="34" charset="-122"/>
-                <a:cs typeface="Arial" pitchFamily="34" charset="-120"/>
+                <a:latin typeface="Inter" pitchFamily="34" charset="0"/>
+                <a:ea typeface="Inter" pitchFamily="34" charset="-122"/>
+                <a:cs typeface="Inter" pitchFamily="34" charset="-120"/>
               </a:rPr>
               <a:t>Captación</a:t>
             </a:r>
@@ -2827,9 +2827,9 @@
                 <a:solidFill>
                   <a:srgbClr val="FFFFFF"/>
                 </a:solidFill>
-                <a:latin typeface="Arial" pitchFamily="34" charset="0"/>
-                <a:ea typeface="Arial" pitchFamily="34" charset="-122"/>
-                <a:cs typeface="Arial" pitchFamily="34" charset="-120"/>
+                <a:latin typeface="Inter" pitchFamily="34" charset="0"/>
+                <a:ea typeface="Inter" pitchFamily="34" charset="-122"/>
+                <a:cs typeface="Inter" pitchFamily="34" charset="-120"/>
               </a:rPr>
               <a:t>y producción</a:t>
             </a:r>
@@ -2893,9 +2893,9 @@
                 <a:solidFill>
                   <a:srgbClr val="FFFFFF"/>
                 </a:solidFill>
-                <a:latin typeface="Arial" pitchFamily="34" charset="0"/>
-                <a:ea typeface="Arial" pitchFamily="34" charset="-122"/>
-                <a:cs typeface="Arial" pitchFamily="34" charset="-120"/>
+                <a:latin typeface="Inter" pitchFamily="34" charset="0"/>
+                <a:ea typeface="Inter" pitchFamily="34" charset="-122"/>
+                <a:cs typeface="Inter" pitchFamily="34" charset="-120"/>
               </a:rPr>
               <a:t>POR QUÉ IMPORTA EL ORDEN</a:t>
             </a:r>
@@ -2935,9 +2935,9 @@
                 <a:solidFill>
                   <a:srgbClr val="FFFFFF"/>
                 </a:solidFill>
-                <a:latin typeface="Arial" pitchFamily="34" charset="0"/>
-                <a:ea typeface="Arial" pitchFamily="34" charset="-122"/>
-                <a:cs typeface="Arial" pitchFamily="34" charset="-120"/>
+                <a:latin typeface="Inter" pitchFamily="34" charset="0"/>
+                <a:ea typeface="Inter" pitchFamily="34" charset="-122"/>
+                <a:cs typeface="Inter" pitchFamily="34" charset="-120"/>
               </a:rPr>
               <a:t>La prospección es el único eslabón que depende enteramente del agente. La tasación depende del mercado y la captación del cliente: prospectar depende solo de si se hizo o no.</a:t>
             </a:r>
@@ -3087,9 +3087,9 @@
                 <a:solidFill>
                   <a:srgbClr val="08407C"/>
                 </a:solidFill>
-                <a:latin typeface="Arial" pitchFamily="34" charset="0"/>
-                <a:ea typeface="Arial" pitchFamily="34" charset="-122"/>
-                <a:cs typeface="Arial" pitchFamily="34" charset="-120"/>
+                <a:latin typeface="Inter" pitchFamily="34" charset="0"/>
+                <a:ea typeface="Inter" pitchFamily="34" charset="-122"/>
+                <a:cs typeface="Inter" pitchFamily="34" charset="-120"/>
               </a:rPr>
               <a:t>Prospección: dos tipos</a:t>
             </a:r>
@@ -3126,9 +3126,9 @@
                 <a:solidFill>
                   <a:srgbClr val="6A7686"/>
                 </a:solidFill>
-                <a:latin typeface="Arial" pitchFamily="34" charset="0"/>
-                <a:ea typeface="Arial" pitchFamily="34" charset="-122"/>
-                <a:cs typeface="Arial" pitchFamily="34" charset="-120"/>
+                <a:latin typeface="Inter" pitchFamily="34" charset="0"/>
+                <a:ea typeface="Inter" pitchFamily="34" charset="-122"/>
+                <a:cs typeface="Inter" pitchFamily="34" charset="-120"/>
               </a:rPr>
               <a:t>Según el horizonte en que devuelve resultados.</a:t>
             </a:r>
@@ -3192,9 +3192,9 @@
                 <a:solidFill>
                   <a:srgbClr val="FFFFFF"/>
                 </a:solidFill>
-                <a:latin typeface="Arial" pitchFamily="34" charset="0"/>
-                <a:ea typeface="Arial" pitchFamily="34" charset="-122"/>
-                <a:cs typeface="Arial" pitchFamily="34" charset="-120"/>
+                <a:latin typeface="Inter" pitchFamily="34" charset="0"/>
+                <a:ea typeface="Inter" pitchFamily="34" charset="-122"/>
+                <a:cs typeface="Inter" pitchFamily="34" charset="-120"/>
               </a:rPr>
               <a:t>CORTO PLAZO</a:t>
             </a:r>
@@ -3211,19 +3211,19 @@
         <p:spPr>
           <a:xfrm>
             <a:off x="603504" y="1737360"/>
-            <a:ext cx="2487168" cy="493776"/>
+            <a:ext cx="2487168" cy="530352"/>
           </a:xfrm>
           <a:prstGeom prst="roundRect">
             <a:avLst>
-              <a:gd name="adj" fmla="val 16667"/>
+              <a:gd name="adj" fmla="val 15517"/>
             </a:avLst>
           </a:prstGeom>
           <a:solidFill>
-            <a:srgbClr val="F2F4F7"/>
+            <a:srgbClr val="F3F3F3"/>
           </a:solidFill>
           <a:ln w="12700">
             <a:solidFill>
-              <a:srgbClr val="F2F4F7"/>
+              <a:srgbClr val="F3F3F3"/>
             </a:solidFill>
             <a:prstDash val="solid"/>
           </a:ln>
@@ -3238,7 +3238,7 @@
         <p:spPr>
           <a:xfrm>
             <a:off x="749808" y="1737360"/>
-            <a:ext cx="2194560" cy="493776"/>
+            <a:ext cx="2212848" cy="530352"/>
           </a:xfrm>
           <a:prstGeom prst="rect">
             <a:avLst/>
@@ -3261,9 +3261,9 @@
                 <a:solidFill>
                   <a:srgbClr val="2E4258"/>
                 </a:solidFill>
-                <a:latin typeface="Arial" pitchFamily="34" charset="0"/>
-                <a:ea typeface="Arial" pitchFamily="34" charset="-122"/>
-                <a:cs typeface="Arial" pitchFamily="34" charset="-120"/>
+                <a:latin typeface="Inter" pitchFamily="34" charset="0"/>
+                <a:ea typeface="Inter" pitchFamily="34" charset="-122"/>
+                <a:cs typeface="Inter" pitchFamily="34" charset="-120"/>
               </a:rPr>
               <a:t>Farming geográfico masivo</a:t>
             </a:r>
@@ -3280,19 +3280,19 @@
         <p:spPr>
           <a:xfrm>
             <a:off x="3191256" y="1737360"/>
-            <a:ext cx="2487168" cy="493776"/>
+            <a:ext cx="2487168" cy="530352"/>
           </a:xfrm>
           <a:prstGeom prst="roundRect">
             <a:avLst>
-              <a:gd name="adj" fmla="val 16667"/>
+              <a:gd name="adj" fmla="val 15517"/>
             </a:avLst>
           </a:prstGeom>
           <a:solidFill>
-            <a:srgbClr val="F2F4F7"/>
+            <a:srgbClr val="F3F3F3"/>
           </a:solidFill>
           <a:ln w="12700">
             <a:solidFill>
-              <a:srgbClr val="F2F4F7"/>
+              <a:srgbClr val="F3F3F3"/>
             </a:solidFill>
             <a:prstDash val="solid"/>
           </a:ln>
@@ -3307,7 +3307,7 @@
         <p:spPr>
           <a:xfrm>
             <a:off x="3337560" y="1737360"/>
-            <a:ext cx="2194560" cy="493776"/>
+            <a:ext cx="2212848" cy="530352"/>
           </a:xfrm>
           <a:prstGeom prst="rect">
             <a:avLst/>
@@ -3330,9 +3330,9 @@
                 <a:solidFill>
                   <a:srgbClr val="2E4258"/>
                 </a:solidFill>
-                <a:latin typeface="Arial" pitchFamily="34" charset="0"/>
-                <a:ea typeface="Arial" pitchFamily="34" charset="-122"/>
-                <a:cs typeface="Arial" pitchFamily="34" charset="-120"/>
+                <a:latin typeface="Inter" pitchFamily="34" charset="0"/>
+                <a:ea typeface="Inter" pitchFamily="34" charset="-122"/>
+                <a:cs typeface="Inter" pitchFamily="34" charset="-120"/>
               </a:rPr>
               <a:t>Farming demográfico</a:t>
             </a:r>
@@ -3348,20 +3348,20 @@
         </p:nvSpPr>
         <p:spPr>
           <a:xfrm>
-            <a:off x="603504" y="2304288"/>
-            <a:ext cx="2487168" cy="493776"/>
+            <a:off x="603504" y="2322576"/>
+            <a:ext cx="2487168" cy="530352"/>
           </a:xfrm>
           <a:prstGeom prst="roundRect">
             <a:avLst>
-              <a:gd name="adj" fmla="val 16667"/>
+              <a:gd name="adj" fmla="val 15517"/>
             </a:avLst>
           </a:prstGeom>
           <a:solidFill>
-            <a:srgbClr val="F2F4F7"/>
+            <a:srgbClr val="F3F3F3"/>
           </a:solidFill>
           <a:ln w="12700">
             <a:solidFill>
-              <a:srgbClr val="F2F4F7"/>
+              <a:srgbClr val="F3F3F3"/>
             </a:solidFill>
             <a:prstDash val="solid"/>
           </a:ln>
@@ -3375,8 +3375,8 @@
         </p:nvSpPr>
         <p:spPr>
           <a:xfrm>
-            <a:off x="749808" y="2304288"/>
-            <a:ext cx="2194560" cy="493776"/>
+            <a:off x="749808" y="2322576"/>
+            <a:ext cx="2212848" cy="530352"/>
           </a:xfrm>
           <a:prstGeom prst="rect">
             <a:avLst/>
@@ -3399,9 +3399,9 @@
                 <a:solidFill>
                   <a:srgbClr val="2E4258"/>
                 </a:solidFill>
-                <a:latin typeface="Arial" pitchFamily="34" charset="0"/>
-                <a:ea typeface="Arial" pitchFamily="34" charset="-122"/>
-                <a:cs typeface="Arial" pitchFamily="34" charset="-120"/>
+                <a:latin typeface="Inter" pitchFamily="34" charset="0"/>
+                <a:ea typeface="Inter" pitchFamily="34" charset="-122"/>
+                <a:cs typeface="Inter" pitchFamily="34" charset="-120"/>
               </a:rPr>
               <a:t>Farming geográfico personalizado</a:t>
             </a:r>
@@ -3417,20 +3417,20 @@
         </p:nvSpPr>
         <p:spPr>
           <a:xfrm>
-            <a:off x="3191256" y="2304288"/>
-            <a:ext cx="2487168" cy="493776"/>
+            <a:off x="3191256" y="2322576"/>
+            <a:ext cx="2487168" cy="530352"/>
           </a:xfrm>
           <a:prstGeom prst="roundRect">
             <a:avLst>
-              <a:gd name="adj" fmla="val 16667"/>
+              <a:gd name="adj" fmla="val 15517"/>
             </a:avLst>
           </a:prstGeom>
           <a:solidFill>
-            <a:srgbClr val="F2F4F7"/>
+            <a:srgbClr val="F3F3F3"/>
           </a:solidFill>
           <a:ln w="12700">
             <a:solidFill>
-              <a:srgbClr val="F2F4F7"/>
+              <a:srgbClr val="F3F3F3"/>
             </a:solidFill>
             <a:prstDash val="solid"/>
           </a:ln>
@@ -3444,8 +3444,8 @@
         </p:nvSpPr>
         <p:spPr>
           <a:xfrm>
-            <a:off x="3337560" y="2304288"/>
-            <a:ext cx="2194560" cy="493776"/>
+            <a:off x="3337560" y="2322576"/>
+            <a:ext cx="2212848" cy="530352"/>
           </a:xfrm>
           <a:prstGeom prst="rect">
             <a:avLst/>
@@ -3468,9 +3468,9 @@
                 <a:solidFill>
                   <a:srgbClr val="2E4258"/>
                 </a:solidFill>
-                <a:latin typeface="Arial" pitchFamily="34" charset="0"/>
-                <a:ea typeface="Arial" pitchFamily="34" charset="-122"/>
-                <a:cs typeface="Arial" pitchFamily="34" charset="-120"/>
+                <a:latin typeface="Inter" pitchFamily="34" charset="0"/>
+                <a:ea typeface="Inter" pitchFamily="34" charset="-122"/>
+                <a:cs typeface="Inter" pitchFamily="34" charset="-120"/>
               </a:rPr>
               <a:t>Dueño vende</a:t>
             </a:r>
@@ -3486,20 +3486,20 @@
         </p:nvSpPr>
         <p:spPr>
           <a:xfrm>
-            <a:off x="603504" y="2871216"/>
-            <a:ext cx="2487168" cy="493776"/>
+            <a:off x="603504" y="2907792"/>
+            <a:ext cx="2487168" cy="530352"/>
           </a:xfrm>
           <a:prstGeom prst="roundRect">
             <a:avLst>
-              <a:gd name="adj" fmla="val 16667"/>
+              <a:gd name="adj" fmla="val 15517"/>
             </a:avLst>
           </a:prstGeom>
           <a:solidFill>
-            <a:srgbClr val="F2F4F7"/>
+            <a:srgbClr val="F3F3F3"/>
           </a:solidFill>
           <a:ln w="12700">
             <a:solidFill>
-              <a:srgbClr val="F2F4F7"/>
+              <a:srgbClr val="F3F3F3"/>
             </a:solidFill>
             <a:prstDash val="solid"/>
           </a:ln>
@@ -3513,8 +3513,8 @@
         </p:nvSpPr>
         <p:spPr>
           <a:xfrm>
-            <a:off x="749808" y="2871216"/>
-            <a:ext cx="2194560" cy="493776"/>
+            <a:off x="749808" y="2907792"/>
+            <a:ext cx="2212848" cy="530352"/>
           </a:xfrm>
           <a:prstGeom prst="rect">
             <a:avLst/>
@@ -3537,9 +3537,9 @@
                 <a:solidFill>
                   <a:srgbClr val="2E4258"/>
                 </a:solidFill>
-                <a:latin typeface="Arial" pitchFamily="34" charset="0"/>
-                <a:ea typeface="Arial" pitchFamily="34" charset="-122"/>
-                <a:cs typeface="Arial" pitchFamily="34" charset="-120"/>
+                <a:latin typeface="Inter" pitchFamily="34" charset="0"/>
+                <a:ea typeface="Inter" pitchFamily="34" charset="-122"/>
+                <a:cs typeface="Inter" pitchFamily="34" charset="-120"/>
               </a:rPr>
               <a:t>Publicidad digital orgánica</a:t>
             </a:r>
@@ -3555,20 +3555,20 @@
         </p:nvSpPr>
         <p:spPr>
           <a:xfrm>
-            <a:off x="3191256" y="2871216"/>
-            <a:ext cx="2487168" cy="493776"/>
+            <a:off x="3191256" y="2907792"/>
+            <a:ext cx="2487168" cy="530352"/>
           </a:xfrm>
           <a:prstGeom prst="roundRect">
             <a:avLst>
-              <a:gd name="adj" fmla="val 16667"/>
+              <a:gd name="adj" fmla="val 15517"/>
             </a:avLst>
           </a:prstGeom>
           <a:solidFill>
-            <a:srgbClr val="F2F4F7"/>
+            <a:srgbClr val="F3F3F3"/>
           </a:solidFill>
           <a:ln w="12700">
             <a:solidFill>
-              <a:srgbClr val="F2F4F7"/>
+              <a:srgbClr val="F3F3F3"/>
             </a:solidFill>
             <a:prstDash val="solid"/>
           </a:ln>
@@ -3582,8 +3582,8 @@
         </p:nvSpPr>
         <p:spPr>
           <a:xfrm>
-            <a:off x="3337560" y="2871216"/>
-            <a:ext cx="2194560" cy="493776"/>
+            <a:off x="3337560" y="2907792"/>
+            <a:ext cx="2212848" cy="530352"/>
           </a:xfrm>
           <a:prstGeom prst="rect">
             <a:avLst/>
@@ -3606,9 +3606,9 @@
                 <a:solidFill>
                   <a:srgbClr val="2E4258"/>
                 </a:solidFill>
-                <a:latin typeface="Arial" pitchFamily="34" charset="0"/>
-                <a:ea typeface="Arial" pitchFamily="34" charset="-122"/>
-                <a:cs typeface="Arial" pitchFamily="34" charset="-120"/>
+                <a:latin typeface="Inter" pitchFamily="34" charset="0"/>
+                <a:ea typeface="Inter" pitchFamily="34" charset="-122"/>
+                <a:cs typeface="Inter" pitchFamily="34" charset="-120"/>
               </a:rPr>
               <a:t>Participación en grupos de colegas</a:t>
             </a:r>
@@ -3624,20 +3624,20 @@
         </p:nvSpPr>
         <p:spPr>
           <a:xfrm>
-            <a:off x="603504" y="3438144"/>
-            <a:ext cx="5074920" cy="493776"/>
+            <a:off x="603504" y="3529584"/>
+            <a:ext cx="5074920" cy="530352"/>
           </a:xfrm>
           <a:prstGeom prst="roundRect">
             <a:avLst>
-              <a:gd name="adj" fmla="val 16667"/>
+              <a:gd name="adj" fmla="val 15517"/>
             </a:avLst>
           </a:prstGeom>
           <a:solidFill>
-            <a:srgbClr val="F2F4F7"/>
+            <a:srgbClr val="F3F3F3"/>
           </a:solidFill>
           <a:ln w="12700">
             <a:solidFill>
-              <a:srgbClr val="F2F4F7"/>
+              <a:srgbClr val="F3F3F3"/>
             </a:solidFill>
             <a:prstDash val="solid"/>
           </a:ln>
@@ -3651,8 +3651,8 @@
         </p:nvSpPr>
         <p:spPr>
           <a:xfrm>
-            <a:off x="749808" y="3438144"/>
-            <a:ext cx="1097280" cy="493776"/>
+            <a:off x="749808" y="3529584"/>
+            <a:ext cx="1097280" cy="530352"/>
           </a:xfrm>
           <a:prstGeom prst="rect">
             <a:avLst/>
@@ -3672,9 +3672,9 @@
                 <a:solidFill>
                   <a:srgbClr val="2E4258"/>
                 </a:solidFill>
-                <a:latin typeface="Arial" pitchFamily="34" charset="0"/>
-                <a:ea typeface="Arial" pitchFamily="34" charset="-122"/>
-                <a:cs typeface="Arial" pitchFamily="34" charset="-120"/>
+                <a:latin typeface="Inter" pitchFamily="34" charset="0"/>
+                <a:ea typeface="Inter" pitchFamily="34" charset="-122"/>
+                <a:cs typeface="Inter" pitchFamily="34" charset="-120"/>
               </a:rPr>
               <a:t>Alianzas</a:t>
             </a:r>
@@ -3690,8 +3690,8 @@
         </p:nvSpPr>
         <p:spPr>
           <a:xfrm>
-            <a:off x="1883664" y="3438144"/>
-            <a:ext cx="3657600" cy="493776"/>
+            <a:off x="1883664" y="3529584"/>
+            <a:ext cx="3657600" cy="530352"/>
           </a:xfrm>
           <a:prstGeom prst="rect">
             <a:avLst/>
@@ -3711,9 +3711,9 @@
                 <a:solidFill>
                   <a:srgbClr val="6A7686"/>
                 </a:solidFill>
-                <a:latin typeface="Arial" pitchFamily="34" charset="0"/>
-                <a:ea typeface="Arial" pitchFamily="34" charset="-122"/>
-                <a:cs typeface="Arial" pitchFamily="34" charset="-120"/>
+                <a:latin typeface="Inter" pitchFamily="34" charset="0"/>
+                <a:ea typeface="Inter" pitchFamily="34" charset="-122"/>
+                <a:cs typeface="Inter" pitchFamily="34" charset="-120"/>
               </a:rPr>
               <a:t>Estratégicas  ·  Profesionales</a:t>
             </a:r>
@@ -3777,9 +3777,9 @@
                 <a:solidFill>
                   <a:srgbClr val="FFFFFF"/>
                 </a:solidFill>
-                <a:latin typeface="Arial" pitchFamily="34" charset="0"/>
-                <a:ea typeface="Arial" pitchFamily="34" charset="-122"/>
-                <a:cs typeface="Arial" pitchFamily="34" charset="-120"/>
+                <a:latin typeface="Inter" pitchFamily="34" charset="0"/>
+                <a:ea typeface="Inter" pitchFamily="34" charset="-122"/>
+                <a:cs typeface="Inter" pitchFamily="34" charset="-120"/>
               </a:rPr>
               <a:t>LARGO PLAZO</a:t>
             </a:r>
@@ -3804,11 +3804,11 @@
             </a:avLst>
           </a:prstGeom>
           <a:solidFill>
-            <a:srgbClr val="F2F4F7"/>
+            <a:srgbClr val="F3F3F3"/>
           </a:solidFill>
           <a:ln w="12700">
             <a:solidFill>
-              <a:srgbClr val="F2F4F7"/>
+              <a:srgbClr val="F3F3F3"/>
             </a:solidFill>
             <a:prstDash val="solid"/>
           </a:ln>
@@ -3846,9 +3846,9 @@
                 <a:solidFill>
                   <a:srgbClr val="2E4258"/>
                 </a:solidFill>
-                <a:latin typeface="Arial" pitchFamily="34" charset="0"/>
-                <a:ea typeface="Arial" pitchFamily="34" charset="-122"/>
-                <a:cs typeface="Arial" pitchFamily="34" charset="-120"/>
+                <a:latin typeface="Inter" pitchFamily="34" charset="0"/>
+                <a:ea typeface="Inter" pitchFamily="34" charset="-122"/>
+                <a:cs typeface="Inter" pitchFamily="34" charset="-120"/>
               </a:rPr>
               <a:t>Prensa</a:t>
             </a:r>
@@ -3873,11 +3873,11 @@
             </a:avLst>
           </a:prstGeom>
           <a:solidFill>
-            <a:srgbClr val="F2F4F7"/>
+            <a:srgbClr val="F3F3F3"/>
           </a:solidFill>
           <a:ln w="12700">
             <a:solidFill>
-              <a:srgbClr val="F2F4F7"/>
+              <a:srgbClr val="F3F3F3"/>
             </a:solidFill>
             <a:prstDash val="solid"/>
           </a:ln>
@@ -3915,9 +3915,9 @@
                 <a:solidFill>
                   <a:srgbClr val="2E4258"/>
                 </a:solidFill>
-                <a:latin typeface="Arial" pitchFamily="34" charset="0"/>
-                <a:ea typeface="Arial" pitchFamily="34" charset="-122"/>
-                <a:cs typeface="Arial" pitchFamily="34" charset="-120"/>
+                <a:latin typeface="Inter" pitchFamily="34" charset="0"/>
+                <a:ea typeface="Inter" pitchFamily="34" charset="-122"/>
+                <a:cs typeface="Inter" pitchFamily="34" charset="-120"/>
               </a:rPr>
               <a:t>Eventos</a:t>
             </a:r>
@@ -3942,11 +3942,11 @@
             </a:avLst>
           </a:prstGeom>
           <a:solidFill>
-            <a:srgbClr val="F2F4F7"/>
+            <a:srgbClr val="F3F3F3"/>
           </a:solidFill>
           <a:ln w="12700">
             <a:solidFill>
-              <a:srgbClr val="F2F4F7"/>
+              <a:srgbClr val="F3F3F3"/>
             </a:solidFill>
             <a:prstDash val="solid"/>
           </a:ln>
@@ -3984,9 +3984,9 @@
                 <a:solidFill>
                   <a:srgbClr val="2E4258"/>
                 </a:solidFill>
-                <a:latin typeface="Arial" pitchFamily="34" charset="0"/>
-                <a:ea typeface="Arial" pitchFamily="34" charset="-122"/>
-                <a:cs typeface="Arial" pitchFamily="34" charset="-120"/>
+                <a:latin typeface="Inter" pitchFamily="34" charset="0"/>
+                <a:ea typeface="Inter" pitchFamily="34" charset="-122"/>
+                <a:cs typeface="Inter" pitchFamily="34" charset="-120"/>
               </a:rPr>
               <a:t>Merch</a:t>
             </a:r>
@@ -4011,11 +4011,11 @@
             </a:avLst>
           </a:prstGeom>
           <a:solidFill>
-            <a:srgbClr val="F2F4F7"/>
+            <a:srgbClr val="F3F3F3"/>
           </a:solidFill>
           <a:ln w="12700">
             <a:solidFill>
-              <a:srgbClr val="F2F4F7"/>
+              <a:srgbClr val="F3F3F3"/>
             </a:solidFill>
             <a:prstDash val="solid"/>
           </a:ln>
@@ -4053,9 +4053,9 @@
                 <a:solidFill>
                   <a:srgbClr val="2E4258"/>
                 </a:solidFill>
-                <a:latin typeface="Arial" pitchFamily="34" charset="0"/>
-                <a:ea typeface="Arial" pitchFamily="34" charset="-122"/>
-                <a:cs typeface="Arial" pitchFamily="34" charset="-120"/>
+                <a:latin typeface="Inter" pitchFamily="34" charset="0"/>
+                <a:ea typeface="Inter" pitchFamily="34" charset="-122"/>
+                <a:cs typeface="Inter" pitchFamily="34" charset="-120"/>
               </a:rPr>
               <a:t>Contenido de valor en redes</a:t>
             </a:r>
@@ -4080,11 +4080,11 @@
             </a:avLst>
           </a:prstGeom>
           <a:solidFill>
-            <a:srgbClr val="F2F4F7"/>
+            <a:srgbClr val="F3F3F3"/>
           </a:solidFill>
           <a:ln w="12700">
             <a:solidFill>
-              <a:srgbClr val="F2F4F7"/>
+              <a:srgbClr val="F3F3F3"/>
             </a:solidFill>
             <a:prstDash val="solid"/>
           </a:ln>
@@ -4122,9 +4122,9 @@
                 <a:solidFill>
                   <a:srgbClr val="2E4258"/>
                 </a:solidFill>
-                <a:latin typeface="Arial" pitchFamily="34" charset="0"/>
-                <a:ea typeface="Arial" pitchFamily="34" charset="-122"/>
-                <a:cs typeface="Arial" pitchFamily="34" charset="-120"/>
+                <a:latin typeface="Inter" pitchFamily="34" charset="0"/>
+                <a:ea typeface="Inter" pitchFamily="34" charset="-122"/>
+                <a:cs typeface="Inter" pitchFamily="34" charset="-120"/>
               </a:rPr>
               <a:t>Publicidad tradicional</a:t>
             </a:r>
@@ -4188,9 +4188,9 @@
                 <a:solidFill>
                   <a:srgbClr val="FFFFFF"/>
                 </a:solidFill>
-                <a:latin typeface="Arial" pitchFamily="34" charset="0"/>
-                <a:ea typeface="Arial" pitchFamily="34" charset="-122"/>
-                <a:cs typeface="Arial" pitchFamily="34" charset="-120"/>
+                <a:latin typeface="Inter" pitchFamily="34" charset="0"/>
+                <a:ea typeface="Inter" pitchFamily="34" charset="-122"/>
+                <a:cs typeface="Inter" pitchFamily="34" charset="-120"/>
               </a:rPr>
               <a:t>LA CLAVE</a:t>
             </a:r>
@@ -4230,9 +4230,9 @@
                 <a:solidFill>
                   <a:srgbClr val="FFFFFF"/>
                 </a:solidFill>
-                <a:latin typeface="Arial" pitchFamily="34" charset="0"/>
-                <a:ea typeface="Arial" pitchFamily="34" charset="-122"/>
-                <a:cs typeface="Arial" pitchFamily="34" charset="-120"/>
+                <a:latin typeface="Inter" pitchFamily="34" charset="0"/>
+                <a:ea typeface="Inter" pitchFamily="34" charset="-122"/>
+                <a:cs typeface="Inter" pitchFamily="34" charset="-120"/>
               </a:rPr>
               <a:t>Sistematizar el proceso.</a:t>
             </a:r>
@@ -4382,9 +4382,9 @@
                 <a:solidFill>
                   <a:srgbClr val="08407C"/>
                 </a:solidFill>
-                <a:latin typeface="Arial" pitchFamily="34" charset="0"/>
-                <a:ea typeface="Arial" pitchFamily="34" charset="-122"/>
-                <a:cs typeface="Arial" pitchFamily="34" charset="-120"/>
+                <a:latin typeface="Inter" pitchFamily="34" charset="0"/>
+                <a:ea typeface="Inter" pitchFamily="34" charset="-122"/>
+                <a:cs typeface="Inter" pitchFamily="34" charset="-120"/>
               </a:rPr>
               <a:t>Prospección: estrategias</a:t>
             </a:r>
@@ -4421,9 +4421,9 @@
                 <a:solidFill>
                   <a:srgbClr val="6A7686"/>
                 </a:solidFill>
-                <a:latin typeface="Arial" pitchFamily="34" charset="0"/>
-                <a:ea typeface="Arial" pitchFamily="34" charset="-122"/>
-                <a:cs typeface="Arial" pitchFamily="34" charset="-120"/>
+                <a:latin typeface="Inter" pitchFamily="34" charset="0"/>
+                <a:ea typeface="Inter" pitchFamily="34" charset="-122"/>
+                <a:cs typeface="Inter" pitchFamily="34" charset="-120"/>
               </a:rPr>
               <a:t>Qué es cada táctica de corto plazo, en una línea.</a:t>
             </a:r>
@@ -4448,11 +4448,11 @@
             </a:avLst>
           </a:prstGeom>
           <a:solidFill>
-            <a:srgbClr val="F2F4F7"/>
+            <a:srgbClr val="F3F3F3"/>
           </a:solidFill>
           <a:ln w="12700">
             <a:solidFill>
-              <a:srgbClr val="F2F4F7"/>
+              <a:srgbClr val="F3F3F3"/>
             </a:solidFill>
             <a:prstDash val="solid"/>
           </a:ln>
@@ -4487,9 +4487,9 @@
                 <a:solidFill>
                   <a:srgbClr val="08407C"/>
                 </a:solidFill>
-                <a:latin typeface="Arial" pitchFamily="34" charset="0"/>
-                <a:ea typeface="Arial" pitchFamily="34" charset="-122"/>
-                <a:cs typeface="Arial" pitchFamily="34" charset="-120"/>
+                <a:latin typeface="Inter" pitchFamily="34" charset="0"/>
+                <a:ea typeface="Inter" pitchFamily="34" charset="-122"/>
+                <a:cs typeface="Inter" pitchFamily="34" charset="-120"/>
               </a:rPr>
               <a:t>Farming geográfico masivo</a:t>
             </a:r>
@@ -4529,9 +4529,9 @@
                 <a:solidFill>
                   <a:srgbClr val="2E4258"/>
                 </a:solidFill>
-                <a:latin typeface="Arial" pitchFamily="34" charset="0"/>
-                <a:ea typeface="Arial" pitchFamily="34" charset="-122"/>
-                <a:cs typeface="Arial" pitchFamily="34" charset="-120"/>
+                <a:latin typeface="Inter" pitchFamily="34" charset="0"/>
+                <a:ea typeface="Inter" pitchFamily="34" charset="-122"/>
+                <a:cs typeface="Inter" pitchFamily="34" charset="-120"/>
               </a:rPr>
               <a:t>Repartir tarjetas, un brochure o una carta a los vecinos de la zona.</a:t>
             </a:r>
@@ -4568,9 +4568,9 @@
                 <a:solidFill>
                   <a:srgbClr val="08407C"/>
                 </a:solidFill>
-                <a:latin typeface="Arial" pitchFamily="34" charset="0"/>
-                <a:ea typeface="Arial" pitchFamily="34" charset="-122"/>
-                <a:cs typeface="Arial" pitchFamily="34" charset="-120"/>
+                <a:latin typeface="Inter" pitchFamily="34" charset="0"/>
+                <a:ea typeface="Inter" pitchFamily="34" charset="-122"/>
+                <a:cs typeface="Inter" pitchFamily="34" charset="-120"/>
               </a:rPr>
               <a:t>Farming geográfico personalizado</a:t>
             </a:r>
@@ -4610,9 +4610,9 @@
                 <a:solidFill>
                   <a:srgbClr val="2E4258"/>
                 </a:solidFill>
-                <a:latin typeface="Arial" pitchFamily="34" charset="0"/>
-                <a:ea typeface="Arial" pitchFamily="34" charset="-122"/>
-                <a:cs typeface="Arial" pitchFamily="34" charset="-120"/>
+                <a:latin typeface="Inter" pitchFamily="34" charset="0"/>
+                <a:ea typeface="Inter" pitchFamily="34" charset="-122"/>
+                <a:cs typeface="Inter" pitchFamily="34" charset="-120"/>
               </a:rPr>
               <a:t>Timbrear y presentarse personalmente.</a:t>
             </a:r>
@@ -4637,11 +4637,11 @@
             </a:avLst>
           </a:prstGeom>
           <a:solidFill>
-            <a:srgbClr val="F2F4F7"/>
+            <a:srgbClr val="F3F3F3"/>
           </a:solidFill>
           <a:ln w="12700">
             <a:solidFill>
-              <a:srgbClr val="F2F4F7"/>
+              <a:srgbClr val="F3F3F3"/>
             </a:solidFill>
             <a:prstDash val="solid"/>
           </a:ln>
@@ -4676,9 +4676,9 @@
                 <a:solidFill>
                   <a:srgbClr val="08407C"/>
                 </a:solidFill>
-                <a:latin typeface="Arial" pitchFamily="34" charset="0"/>
-                <a:ea typeface="Arial" pitchFamily="34" charset="-122"/>
-                <a:cs typeface="Arial" pitchFamily="34" charset="-120"/>
+                <a:latin typeface="Inter" pitchFamily="34" charset="0"/>
+                <a:ea typeface="Inter" pitchFamily="34" charset="-122"/>
+                <a:cs typeface="Inter" pitchFamily="34" charset="-120"/>
               </a:rPr>
               <a:t>Publicidad digital orgánica</a:t>
             </a:r>
@@ -4718,9 +4718,9 @@
                 <a:solidFill>
                   <a:srgbClr val="2E4258"/>
                 </a:solidFill>
-                <a:latin typeface="Arial" pitchFamily="34" charset="0"/>
-                <a:ea typeface="Arial" pitchFamily="34" charset="-122"/>
-                <a:cs typeface="Arial" pitchFamily="34" charset="-120"/>
+                <a:latin typeface="Inter" pitchFamily="34" charset="0"/>
+                <a:ea typeface="Inter" pitchFamily="34" charset="-122"/>
+                <a:cs typeface="Inter" pitchFamily="34" charset="-120"/>
               </a:rPr>
               <a:t>Comunicar por redes sociales, sin pauta.</a:t>
             </a:r>
@@ -4757,9 +4757,9 @@
                 <a:solidFill>
                   <a:srgbClr val="08407C"/>
                 </a:solidFill>
-                <a:latin typeface="Arial" pitchFamily="34" charset="0"/>
-                <a:ea typeface="Arial" pitchFamily="34" charset="-122"/>
-                <a:cs typeface="Arial" pitchFamily="34" charset="-120"/>
+                <a:latin typeface="Inter" pitchFamily="34" charset="0"/>
+                <a:ea typeface="Inter" pitchFamily="34" charset="-122"/>
+                <a:cs typeface="Inter" pitchFamily="34" charset="-120"/>
               </a:rPr>
               <a:t>Participación en grupos de colegas</a:t>
             </a:r>
@@ -4799,9 +4799,9 @@
                 <a:solidFill>
                   <a:srgbClr val="2E4258"/>
                 </a:solidFill>
-                <a:latin typeface="Arial" pitchFamily="34" charset="0"/>
-                <a:ea typeface="Arial" pitchFamily="34" charset="-122"/>
-                <a:cs typeface="Arial" pitchFamily="34" charset="-120"/>
+                <a:latin typeface="Inter" pitchFamily="34" charset="0"/>
+                <a:ea typeface="Inter" pitchFamily="34" charset="-122"/>
+                <a:cs typeface="Inter" pitchFamily="34" charset="-120"/>
               </a:rPr>
               <a:t>Foros, grupos de WhatsApp, LinkedIn.</a:t>
             </a:r>
@@ -4826,11 +4826,11 @@
             </a:avLst>
           </a:prstGeom>
           <a:solidFill>
-            <a:srgbClr val="F2F4F7"/>
+            <a:srgbClr val="F3F3F3"/>
           </a:solidFill>
           <a:ln w="12700">
             <a:solidFill>
-              <a:srgbClr val="F2F4F7"/>
+              <a:srgbClr val="F3F3F3"/>
             </a:solidFill>
             <a:prstDash val="solid"/>
           </a:ln>
@@ -4865,9 +4865,9 @@
                 <a:solidFill>
                   <a:srgbClr val="08407C"/>
                 </a:solidFill>
-                <a:latin typeface="Arial" pitchFamily="34" charset="0"/>
-                <a:ea typeface="Arial" pitchFamily="34" charset="-122"/>
-                <a:cs typeface="Arial" pitchFamily="34" charset="-120"/>
+                <a:latin typeface="Inter" pitchFamily="34" charset="0"/>
+                <a:ea typeface="Inter" pitchFamily="34" charset="-122"/>
+                <a:cs typeface="Inter" pitchFamily="34" charset="-120"/>
               </a:rPr>
               <a:t>Farming demográfico</a:t>
             </a:r>
@@ -4907,9 +4907,9 @@
                 <a:solidFill>
                   <a:srgbClr val="2E4258"/>
                 </a:solidFill>
-                <a:latin typeface="Arial" pitchFamily="34" charset="0"/>
-                <a:ea typeface="Arial" pitchFamily="34" charset="-122"/>
-                <a:cs typeface="Arial" pitchFamily="34" charset="-120"/>
+                <a:latin typeface="Inter" pitchFamily="34" charset="0"/>
+                <a:ea typeface="Inter" pitchFamily="34" charset="-122"/>
+                <a:cs typeface="Inter" pitchFamily="34" charset="-120"/>
               </a:rPr>
               <a:t>Por segmentación: amigos del colegio, del gimnasio, del club.</a:t>
             </a:r>
@@ -4946,9 +4946,9 @@
                 <a:solidFill>
                   <a:srgbClr val="08407C"/>
                 </a:solidFill>
-                <a:latin typeface="Arial" pitchFamily="34" charset="0"/>
-                <a:ea typeface="Arial" pitchFamily="34" charset="-122"/>
-                <a:cs typeface="Arial" pitchFamily="34" charset="-120"/>
+                <a:latin typeface="Inter" pitchFamily="34" charset="0"/>
+                <a:ea typeface="Inter" pitchFamily="34" charset="-122"/>
+                <a:cs typeface="Inter" pitchFamily="34" charset="-120"/>
               </a:rPr>
               <a:t>Dueño vende</a:t>
             </a:r>
@@ -4988,9 +4988,9 @@
                 <a:solidFill>
                   <a:srgbClr val="2E4258"/>
                 </a:solidFill>
-                <a:latin typeface="Arial" pitchFamily="34" charset="0"/>
-                <a:ea typeface="Arial" pitchFamily="34" charset="-122"/>
-                <a:cs typeface="Arial" pitchFamily="34" charset="-120"/>
+                <a:latin typeface="Inter" pitchFamily="34" charset="0"/>
+                <a:ea typeface="Inter" pitchFamily="34" charset="-122"/>
+                <a:cs typeface="Inter" pitchFamily="34" charset="-120"/>
               </a:rPr>
               <a:t>Aportar valor para que quien no va a ser tu cliente te recomiende. “Esta gente sabe”.</a:t>
             </a:r>
@@ -5015,11 +5015,11 @@
             </a:avLst>
           </a:prstGeom>
           <a:solidFill>
-            <a:srgbClr val="F2F4F7"/>
+            <a:srgbClr val="F3F3F3"/>
           </a:solidFill>
           <a:ln w="12700">
             <a:solidFill>
-              <a:srgbClr val="F2F4F7"/>
+              <a:srgbClr val="F3F3F3"/>
             </a:solidFill>
             <a:prstDash val="solid"/>
           </a:ln>
@@ -5054,9 +5054,9 @@
                 <a:solidFill>
                   <a:srgbClr val="08407C"/>
                 </a:solidFill>
-                <a:latin typeface="Arial" pitchFamily="34" charset="0"/>
-                <a:ea typeface="Arial" pitchFamily="34" charset="-122"/>
-                <a:cs typeface="Arial" pitchFamily="34" charset="-120"/>
+                <a:latin typeface="Inter" pitchFamily="34" charset="0"/>
+                <a:ea typeface="Inter" pitchFamily="34" charset="-122"/>
+                <a:cs typeface="Inter" pitchFamily="34" charset="-120"/>
               </a:rPr>
               <a:t>Alianzas</a:t>
             </a:r>
@@ -5096,9 +5096,9 @@
                 <a:solidFill>
                   <a:srgbClr val="2E4258"/>
                 </a:solidFill>
-                <a:latin typeface="Arial" pitchFamily="34" charset="0"/>
-                <a:ea typeface="Arial" pitchFamily="34" charset="-122"/>
-                <a:cs typeface="Arial" pitchFamily="34" charset="-120"/>
+                <a:latin typeface="Inter" pitchFamily="34" charset="0"/>
+                <a:ea typeface="Inter" pitchFamily="34" charset="-122"/>
+                <a:cs typeface="Inter" pitchFamily="34" charset="-120"/>
               </a:rPr>
               <a:t>Estratégicas: encargados, colegas, desarrolladores. Profesionales: abogados, contadores, escribanos.</a:t>
             </a:r>
@@ -5248,9 +5248,9 @@
                 <a:solidFill>
                   <a:srgbClr val="08407C"/>
                 </a:solidFill>
-                <a:latin typeface="Arial" pitchFamily="34" charset="0"/>
-                <a:ea typeface="Arial" pitchFamily="34" charset="-122"/>
-                <a:cs typeface="Arial" pitchFamily="34" charset="-120"/>
+                <a:latin typeface="Inter" pitchFamily="34" charset="0"/>
+                <a:ea typeface="Inter" pitchFamily="34" charset="-122"/>
+                <a:cs typeface="Inter" pitchFamily="34" charset="-120"/>
               </a:rPr>
               <a:t>Prospección: estrategias de campo</a:t>
             </a:r>
@@ -5287,9 +5287,9 @@
                 <a:solidFill>
                   <a:srgbClr val="6A7686"/>
                 </a:solidFill>
-                <a:latin typeface="Arial" pitchFamily="34" charset="0"/>
-                <a:ea typeface="Arial" pitchFamily="34" charset="-122"/>
-                <a:cs typeface="Arial" pitchFamily="34" charset="-120"/>
+                <a:latin typeface="Inter" pitchFamily="34" charset="0"/>
+                <a:ea typeface="Inter" pitchFamily="34" charset="-122"/>
+                <a:cs typeface="Inter" pitchFamily="34" charset="-120"/>
               </a:rPr>
               <a:t>El trabajo de relación que sostiene todo lo anterior.</a:t>
             </a:r>
@@ -5356,9 +5356,9 @@
                 <a:solidFill>
                   <a:srgbClr val="FFFFFF"/>
                 </a:solidFill>
-                <a:latin typeface="Arial" pitchFamily="34" charset="0"/>
-                <a:ea typeface="Arial" pitchFamily="34" charset="-122"/>
-                <a:cs typeface="Arial" pitchFamily="34" charset="-120"/>
+                <a:latin typeface="Inter" pitchFamily="34" charset="0"/>
+                <a:ea typeface="Inter" pitchFamily="34" charset="-122"/>
+                <a:cs typeface="Inter" pitchFamily="34" charset="-120"/>
               </a:rPr>
               <a:t>Círculo de influencia</a:t>
             </a:r>
@@ -5396,11 +5396,11 @@
             <a:r>
               <a:rPr lang="en-US" sz="1000" dirty="0">
                 <a:solidFill>
-                  <a:srgbClr val="DCE6F2"/>
-                </a:solidFill>
-                <a:latin typeface="Arial" pitchFamily="34" charset="0"/>
-                <a:ea typeface="Arial" pitchFamily="34" charset="-122"/>
-                <a:cs typeface="Arial" pitchFamily="34" charset="-120"/>
+                  <a:srgbClr val="CDD8E4"/>
+                </a:solidFill>
+                <a:latin typeface="Inter" pitchFamily="34" charset="0"/>
+                <a:ea typeface="Inter" pitchFamily="34" charset="-122"/>
+                <a:cs typeface="Inter" pitchFamily="34" charset="-120"/>
               </a:rPr>
               <a:t>Familiares y amigos cercanos son los primeros a quienes pedir referencias.</a:t>
             </a:r>
@@ -5467,9 +5467,9 @@
                 <a:solidFill>
                   <a:srgbClr val="FFFFFF"/>
                 </a:solidFill>
-                <a:latin typeface="Arial" pitchFamily="34" charset="0"/>
-                <a:ea typeface="Arial" pitchFamily="34" charset="-122"/>
-                <a:cs typeface="Arial" pitchFamily="34" charset="-120"/>
+                <a:latin typeface="Inter" pitchFamily="34" charset="0"/>
+                <a:ea typeface="Inter" pitchFamily="34" charset="-122"/>
+                <a:cs typeface="Inter" pitchFamily="34" charset="-120"/>
               </a:rPr>
               <a:t>Conocer más gente</a:t>
             </a:r>
@@ -5507,11 +5507,11 @@
             <a:r>
               <a:rPr lang="en-US" sz="1000" dirty="0">
                 <a:solidFill>
-                  <a:srgbClr val="F0F2F5"/>
-                </a:solidFill>
-                <a:latin typeface="Arial" pitchFamily="34" charset="0"/>
-                <a:ea typeface="Arial" pitchFamily="34" charset="-122"/>
-                <a:cs typeface="Arial" pitchFamily="34" charset="-120"/>
+                  <a:srgbClr val="E4E6E9"/>
+                </a:solidFill>
+                <a:latin typeface="Inter" pitchFamily="34" charset="0"/>
+                <a:ea typeface="Inter" pitchFamily="34" charset="-122"/>
+                <a:cs typeface="Inter" pitchFamily="34" charset="-120"/>
               </a:rPr>
               <a:t>Tomarse en serio la siembra de relaciones.</a:t>
             </a:r>
@@ -5578,9 +5578,9 @@
                 <a:solidFill>
                   <a:srgbClr val="FFFFFF"/>
                 </a:solidFill>
-                <a:latin typeface="Arial" pitchFamily="34" charset="0"/>
-                <a:ea typeface="Arial" pitchFamily="34" charset="-122"/>
-                <a:cs typeface="Arial" pitchFamily="34" charset="-120"/>
+                <a:latin typeface="Inter" pitchFamily="34" charset="0"/>
+                <a:ea typeface="Inter" pitchFamily="34" charset="-122"/>
+                <a:cs typeface="Inter" pitchFamily="34" charset="-120"/>
               </a:rPr>
               <a:t>Marketing de contenido</a:t>
             </a:r>
@@ -5618,11 +5618,11 @@
             <a:r>
               <a:rPr lang="en-US" sz="1000" dirty="0">
                 <a:solidFill>
-                  <a:srgbClr val="DCE6F2"/>
-                </a:solidFill>
-                <a:latin typeface="Arial" pitchFamily="34" charset="0"/>
-                <a:ea typeface="Arial" pitchFamily="34" charset="-122"/>
-                <a:cs typeface="Arial" pitchFamily="34" charset="-120"/>
+                  <a:srgbClr val="CDD8E4"/>
+                </a:solidFill>
+                <a:latin typeface="Inter" pitchFamily="34" charset="0"/>
+                <a:ea typeface="Inter" pitchFamily="34" charset="-122"/>
+                <a:cs typeface="Inter" pitchFamily="34" charset="-120"/>
               </a:rPr>
               <a:t>Puede ser personalizado: el valor crea una marca personal y, en consecuencia, un recuerdo.</a:t>
             </a:r>
@@ -5689,9 +5689,9 @@
                 <a:solidFill>
                   <a:srgbClr val="FFFFFF"/>
                 </a:solidFill>
-                <a:latin typeface="Arial" pitchFamily="34" charset="0"/>
-                <a:ea typeface="Arial" pitchFamily="34" charset="-122"/>
-                <a:cs typeface="Arial" pitchFamily="34" charset="-120"/>
+                <a:latin typeface="Inter" pitchFamily="34" charset="0"/>
+                <a:ea typeface="Inter" pitchFamily="34" charset="-122"/>
+                <a:cs typeface="Inter" pitchFamily="34" charset="-120"/>
               </a:rPr>
               <a:t>Marketing digital</a:t>
             </a:r>
@@ -5729,11 +5729,11 @@
             <a:r>
               <a:rPr lang="en-US" sz="1000" dirty="0">
                 <a:solidFill>
-                  <a:srgbClr val="F0F2F5"/>
-                </a:solidFill>
-                <a:latin typeface="Arial" pitchFamily="34" charset="0"/>
-                <a:ea typeface="Arial" pitchFamily="34" charset="-122"/>
-                <a:cs typeface="Arial" pitchFamily="34" charset="-120"/>
+                  <a:srgbClr val="E4E6E9"/>
+                </a:solidFill>
+                <a:latin typeface="Inter" pitchFamily="34" charset="0"/>
+                <a:ea typeface="Inter" pitchFamily="34" charset="-122"/>
+                <a:cs typeface="Inter" pitchFamily="34" charset="-120"/>
               </a:rPr>
               <a:t>Agregar valor en redes sociales.</a:t>
             </a:r>
@@ -5800,9 +5800,9 @@
                 <a:solidFill>
                   <a:srgbClr val="FFFFFF"/>
                 </a:solidFill>
-                <a:latin typeface="Arial" pitchFamily="34" charset="0"/>
-                <a:ea typeface="Arial" pitchFamily="34" charset="-122"/>
-                <a:cs typeface="Arial" pitchFamily="34" charset="-120"/>
+                <a:latin typeface="Inter" pitchFamily="34" charset="0"/>
+                <a:ea typeface="Inter" pitchFamily="34" charset="-122"/>
+                <a:cs typeface="Inter" pitchFamily="34" charset="-120"/>
               </a:rPr>
               <a:t>Organizar eventos</a:t>
             </a:r>
@@ -5840,11 +5840,11 @@
             <a:r>
               <a:rPr lang="en-US" sz="1000" dirty="0">
                 <a:solidFill>
-                  <a:srgbClr val="DCE6F2"/>
-                </a:solidFill>
-                <a:latin typeface="Arial" pitchFamily="34" charset="0"/>
-                <a:ea typeface="Arial" pitchFamily="34" charset="-122"/>
-                <a:cs typeface="Arial" pitchFamily="34" charset="-120"/>
+                  <a:srgbClr val="CDD8E4"/>
+                </a:solidFill>
+                <a:latin typeface="Inter" pitchFamily="34" charset="0"/>
+                <a:ea typeface="Inter" pitchFamily="34" charset="-122"/>
+                <a:cs typeface="Inter" pitchFamily="34" charset="-120"/>
               </a:rPr>
               <a:t>Invitar a comer, invitar a jugar un deporte.</a:t>
             </a:r>
@@ -5908,9 +5908,9 @@
                 <a:solidFill>
                   <a:srgbClr val="FFFFFF"/>
                 </a:solidFill>
-                <a:latin typeface="Arial" pitchFamily="34" charset="0"/>
-                <a:ea typeface="Arial" pitchFamily="34" charset="-122"/>
-                <a:cs typeface="Arial" pitchFamily="34" charset="-120"/>
+                <a:latin typeface="Inter" pitchFamily="34" charset="0"/>
+                <a:ea typeface="Inter" pitchFamily="34" charset="-122"/>
+                <a:cs typeface="Inter" pitchFamily="34" charset="-120"/>
               </a:rPr>
               <a:t>LA DIFERENCIA</a:t>
             </a:r>
@@ -5950,9 +5950,9 @@
                 <a:solidFill>
                   <a:srgbClr val="FFFFFF"/>
                 </a:solidFill>
-                <a:latin typeface="Arial" pitchFamily="34" charset="0"/>
-                <a:ea typeface="Arial" pitchFamily="34" charset="-122"/>
-                <a:cs typeface="Arial" pitchFamily="34" charset="-120"/>
+                <a:latin typeface="Inter" pitchFamily="34" charset="0"/>
+                <a:ea typeface="Inter" pitchFamily="34" charset="-122"/>
+                <a:cs typeface="Inter" pitchFamily="34" charset="-120"/>
               </a:rPr>
               <a:t>La siembra no se mide en captaciones este mes: se mide en conversaciones nuevas por semana.</a:t>
             </a:r>
@@ -6102,9 +6102,9 @@
                 <a:solidFill>
                   <a:srgbClr val="08407C"/>
                 </a:solidFill>
-                <a:latin typeface="Arial" pitchFamily="34" charset="0"/>
-                <a:ea typeface="Arial" pitchFamily="34" charset="-122"/>
-                <a:cs typeface="Arial" pitchFamily="34" charset="-120"/>
+                <a:latin typeface="Inter" pitchFamily="34" charset="0"/>
+                <a:ea typeface="Inter" pitchFamily="34" charset="-122"/>
+                <a:cs typeface="Inter" pitchFamily="34" charset="-120"/>
               </a:rPr>
               <a:t>Antes de prospectar</a:t>
             </a:r>
@@ -6141,9 +6141,9 @@
                 <a:solidFill>
                   <a:srgbClr val="6A7686"/>
                 </a:solidFill>
-                <a:latin typeface="Arial" pitchFamily="34" charset="0"/>
-                <a:ea typeface="Arial" pitchFamily="34" charset="-122"/>
-                <a:cs typeface="Arial" pitchFamily="34" charset="-120"/>
+                <a:latin typeface="Inter" pitchFamily="34" charset="0"/>
+                <a:ea typeface="Inter" pitchFamily="34" charset="-122"/>
+                <a:cs typeface="Inter" pitchFamily="34" charset="-120"/>
               </a:rPr>
               <a:t>Dos conceptos, y el primero es una pregunta.</a:t>
             </a:r>
@@ -6180,9 +6180,9 @@
                 <a:solidFill>
                   <a:srgbClr val="08407C"/>
                 </a:solidFill>
-                <a:latin typeface="Arial" pitchFamily="34" charset="0"/>
-                <a:ea typeface="Arial" pitchFamily="34" charset="-122"/>
-                <a:cs typeface="Arial" pitchFamily="34" charset="-120"/>
+                <a:latin typeface="Inter" pitchFamily="34" charset="0"/>
+                <a:ea typeface="Inter" pitchFamily="34" charset="-122"/>
+                <a:cs typeface="Inter" pitchFamily="34" charset="-120"/>
               </a:rPr>
               <a:t>¿Cuál es el producto que vendemos?</a:t>
             </a:r>
@@ -6267,9 +6267,9 @@
                 <a:solidFill>
                   <a:srgbClr val="6A7686"/>
                 </a:solidFill>
-                <a:latin typeface="Arial" pitchFamily="34" charset="0"/>
-                <a:ea typeface="Arial" pitchFamily="34" charset="-122"/>
-                <a:cs typeface="Arial" pitchFamily="34" charset="-120"/>
+                <a:latin typeface="Inter" pitchFamily="34" charset="0"/>
+                <a:ea typeface="Inter" pitchFamily="34" charset="-122"/>
+                <a:cs typeface="Inter" pitchFamily="34" charset="-120"/>
               </a:rPr>
               <a:t>¿La propiedad?</a:t>
             </a:r>
@@ -6306,9 +6306,9 @@
                 <a:solidFill>
                   <a:srgbClr val="6A7686"/>
                 </a:solidFill>
-                <a:latin typeface="Arial" pitchFamily="34" charset="0"/>
-                <a:ea typeface="Arial" pitchFamily="34" charset="-122"/>
-                <a:cs typeface="Arial" pitchFamily="34" charset="-120"/>
+                <a:latin typeface="Inter" pitchFamily="34" charset="0"/>
+                <a:ea typeface="Inter" pitchFamily="34" charset="-122"/>
+                <a:cs typeface="Inter" pitchFamily="34" charset="-120"/>
               </a:rPr>
               <a:t>¿El servicio?</a:t>
             </a:r>
@@ -6458,9 +6458,9 @@
                 <a:solidFill>
                   <a:srgbClr val="08407C"/>
                 </a:solidFill>
-                <a:latin typeface="Arial" pitchFamily="34" charset="0"/>
-                <a:ea typeface="Arial" pitchFamily="34" charset="-122"/>
-                <a:cs typeface="Arial" pitchFamily="34" charset="-120"/>
+                <a:latin typeface="Inter" pitchFamily="34" charset="0"/>
+                <a:ea typeface="Inter" pitchFamily="34" charset="-122"/>
+                <a:cs typeface="Inter" pitchFamily="34" charset="-120"/>
               </a:rPr>
               <a:t>Antes de prospectar</a:t>
             </a:r>
@@ -6497,9 +6497,9 @@
                 <a:solidFill>
                   <a:srgbClr val="6A7686"/>
                 </a:solidFill>
-                <a:latin typeface="Arial" pitchFamily="34" charset="0"/>
-                <a:ea typeface="Arial" pitchFamily="34" charset="-122"/>
-                <a:cs typeface="Arial" pitchFamily="34" charset="-120"/>
+                <a:latin typeface="Inter" pitchFamily="34" charset="0"/>
+                <a:ea typeface="Inter" pitchFamily="34" charset="-122"/>
+                <a:cs typeface="Inter" pitchFamily="34" charset="-120"/>
               </a:rPr>
               <a:t>La respuesta.</a:t>
             </a:r>
@@ -6590,9 +6590,9 @@
                 <a:solidFill>
                   <a:srgbClr val="FFFFFF"/>
                 </a:solidFill>
-                <a:latin typeface="Arial" pitchFamily="34" charset="0"/>
-                <a:ea typeface="Arial" pitchFamily="34" charset="-122"/>
-                <a:cs typeface="Arial" pitchFamily="34" charset="-120"/>
+                <a:latin typeface="Inter" pitchFamily="34" charset="0"/>
+                <a:ea typeface="Inter" pitchFamily="34" charset="-122"/>
+                <a:cs typeface="Inter" pitchFamily="34" charset="-120"/>
               </a:rPr>
               <a:t>Nos vendemos a nosotros prestando el servicio que el cliente necesita.</a:t>
             </a:r>
@@ -6630,11 +6630,11 @@
             <a:r>
               <a:rPr lang="en-US" sz="1200" dirty="0">
                 <a:solidFill>
-                  <a:srgbClr val="DCE6F2"/>
-                </a:solidFill>
-                <a:latin typeface="Arial" pitchFamily="34" charset="0"/>
-                <a:ea typeface="Arial" pitchFamily="34" charset="-122"/>
-                <a:cs typeface="Arial" pitchFamily="34" charset="-120"/>
+                  <a:srgbClr val="CDD8E4"/>
+                </a:solidFill>
+                <a:latin typeface="Inter" pitchFamily="34" charset="0"/>
+                <a:ea typeface="Inter" pitchFamily="34" charset="-122"/>
+                <a:cs typeface="Inter" pitchFamily="34" charset="-120"/>
               </a:rPr>
               <a:t>No es solamente el servicio: es la experiencia de usuario que le damos al cliente.</a:t>
             </a:r>
@@ -6698,9 +6698,9 @@
                 <a:solidFill>
                   <a:srgbClr val="FFFFFF"/>
                 </a:solidFill>
-                <a:latin typeface="Arial" pitchFamily="34" charset="0"/>
-                <a:ea typeface="Arial" pitchFamily="34" charset="-122"/>
-                <a:cs typeface="Arial" pitchFamily="34" charset="-120"/>
+                <a:latin typeface="Inter" pitchFamily="34" charset="0"/>
+                <a:ea typeface="Inter" pitchFamily="34" charset="-122"/>
+                <a:cs typeface="Inter" pitchFamily="34" charset="-120"/>
               </a:rPr>
               <a:t>LO QUE SE LLEVA EL CLIENTE</a:t>
             </a:r>
@@ -6740,9 +6740,9 @@
                 <a:solidFill>
                   <a:srgbClr val="FFFFFF"/>
                 </a:solidFill>
-                <a:latin typeface="Arial" pitchFamily="34" charset="0"/>
-                <a:ea typeface="Arial" pitchFamily="34" charset="-122"/>
-                <a:cs typeface="Arial" pitchFamily="34" charset="-120"/>
+                <a:latin typeface="Inter" pitchFamily="34" charset="0"/>
+                <a:ea typeface="Inter" pitchFamily="34" charset="-122"/>
+                <a:cs typeface="Inter" pitchFamily="34" charset="-120"/>
               </a:rPr>
               <a:t>La propiedad la puede ver en cualquier portal. Lo que no puede comparar es cómo lo trataron, cuánto tardaron en responderle y qué tan acompañado se sintió en la operación.</a:t>
             </a:r>
@@ -6892,9 +6892,9 @@
                 <a:solidFill>
                   <a:srgbClr val="08407C"/>
                 </a:solidFill>
-                <a:latin typeface="Arial" pitchFamily="34" charset="0"/>
-                <a:ea typeface="Arial" pitchFamily="34" charset="-122"/>
-                <a:cs typeface="Arial" pitchFamily="34" charset="-120"/>
+                <a:latin typeface="Inter" pitchFamily="34" charset="0"/>
+                <a:ea typeface="Inter" pitchFamily="34" charset="-122"/>
+                <a:cs typeface="Inter" pitchFamily="34" charset="-120"/>
               </a:rPr>
               <a:t>La imagen lo es todo</a:t>
             </a:r>
@@ -6931,9 +6931,9 @@
                 <a:solidFill>
                   <a:srgbClr val="6A7686"/>
                 </a:solidFill>
-                <a:latin typeface="Arial" pitchFamily="34" charset="0"/>
-                <a:ea typeface="Arial" pitchFamily="34" charset="-122"/>
-                <a:cs typeface="Arial" pitchFamily="34" charset="-120"/>
+                <a:latin typeface="Inter" pitchFamily="34" charset="0"/>
+                <a:ea typeface="Inter" pitchFamily="34" charset="-122"/>
+                <a:cs typeface="Inter" pitchFamily="34" charset="-120"/>
               </a:rPr>
               <a:t>Pensar en la experiencia del usuario con el producto.</a:t>
             </a:r>
@@ -6958,11 +6958,11 @@
             </a:avLst>
           </a:prstGeom>
           <a:solidFill>
-            <a:srgbClr val="F2F4F7"/>
+            <a:srgbClr val="F3F3F3"/>
           </a:solidFill>
           <a:ln w="12700">
             <a:solidFill>
-              <a:srgbClr val="F2F4F7"/>
+              <a:srgbClr val="F3F3F3"/>
             </a:solidFill>
             <a:prstDash val="solid"/>
           </a:ln>
@@ -6997,9 +6997,9 @@
                 <a:solidFill>
                   <a:srgbClr val="08407C"/>
                 </a:solidFill>
-                <a:latin typeface="Arial" pitchFamily="34" charset="0"/>
-                <a:ea typeface="Arial" pitchFamily="34" charset="-122"/>
-                <a:cs typeface="Arial" pitchFamily="34" charset="-120"/>
+                <a:latin typeface="Inter" pitchFamily="34" charset="0"/>
+                <a:ea typeface="Inter" pitchFamily="34" charset="-122"/>
+                <a:cs typeface="Inter" pitchFamily="34" charset="-120"/>
               </a:rPr>
               <a:t>Vestimenta</a:t>
             </a:r>
@@ -7039,9 +7039,9 @@
                 <a:solidFill>
                   <a:srgbClr val="2E4258"/>
                 </a:solidFill>
-                <a:latin typeface="Arial" pitchFamily="34" charset="0"/>
-                <a:ea typeface="Arial" pitchFamily="34" charset="-122"/>
-                <a:cs typeface="Arial" pitchFamily="34" charset="-120"/>
+                <a:latin typeface="Inter" pitchFamily="34" charset="0"/>
+                <a:ea typeface="Inter" pitchFamily="34" charset="-122"/>
+                <a:cs typeface="Inter" pitchFamily="34" charset="-120"/>
               </a:rPr>
               <a:t>Traje o conjunto de saco y pantalón; con buen clima, camisa de calidad. Traje sastre, vestido formal o blusa con falda o pantalón. Zapatos limpios y en buen estado.</a:t>
             </a:r>
@@ -7105,9 +7105,9 @@
                 <a:solidFill>
                   <a:srgbClr val="08407C"/>
                 </a:solidFill>
-                <a:latin typeface="Arial" pitchFamily="34" charset="0"/>
-                <a:ea typeface="Arial" pitchFamily="34" charset="-122"/>
-                <a:cs typeface="Arial" pitchFamily="34" charset="-120"/>
+                <a:latin typeface="Inter" pitchFamily="34" charset="0"/>
+                <a:ea typeface="Inter" pitchFamily="34" charset="-122"/>
+                <a:cs typeface="Inter" pitchFamily="34" charset="-120"/>
               </a:rPr>
               <a:t>Higiene personal</a:t>
             </a:r>
@@ -7147,9 +7147,9 @@
                 <a:solidFill>
                   <a:srgbClr val="2E4258"/>
                 </a:solidFill>
-                <a:latin typeface="Arial" pitchFamily="34" charset="0"/>
-                <a:ea typeface="Arial" pitchFamily="34" charset="-122"/>
-                <a:cs typeface="Arial" pitchFamily="34" charset="-120"/>
+                <a:latin typeface="Inter" pitchFamily="34" charset="0"/>
+                <a:ea typeface="Inter" pitchFamily="34" charset="-122"/>
+                <a:cs typeface="Inter" pitchFamily="34" charset="-120"/>
               </a:rPr>
               <a:t>Cabello limpio y arreglado, uñas cuidadas, perfume o colonia en uso moderado.</a:t>
             </a:r>
@@ -7174,11 +7174,11 @@
             </a:avLst>
           </a:prstGeom>
           <a:solidFill>
-            <a:srgbClr val="F2F4F7"/>
+            <a:srgbClr val="F3F3F3"/>
           </a:solidFill>
           <a:ln w="12700">
             <a:solidFill>
-              <a:srgbClr val="F2F4F7"/>
+              <a:srgbClr val="F3F3F3"/>
             </a:solidFill>
             <a:prstDash val="solid"/>
           </a:ln>
@@ -7213,9 +7213,9 @@
                 <a:solidFill>
                   <a:srgbClr val="08407C"/>
                 </a:solidFill>
-                <a:latin typeface="Arial" pitchFamily="34" charset="0"/>
-                <a:ea typeface="Arial" pitchFamily="34" charset="-122"/>
-                <a:cs typeface="Arial" pitchFamily="34" charset="-120"/>
+                <a:latin typeface="Inter" pitchFamily="34" charset="0"/>
+                <a:ea typeface="Inter" pitchFamily="34" charset="-122"/>
+                <a:cs typeface="Inter" pitchFamily="34" charset="-120"/>
               </a:rPr>
               <a:t>Accesorios</a:t>
             </a:r>
@@ -7255,9 +7255,9 @@
                 <a:solidFill>
                   <a:srgbClr val="2E4258"/>
                 </a:solidFill>
-                <a:latin typeface="Arial" pitchFamily="34" charset="0"/>
-                <a:ea typeface="Arial" pitchFamily="34" charset="-122"/>
-                <a:cs typeface="Arial" pitchFamily="34" charset="-120"/>
+                <a:latin typeface="Inter" pitchFamily="34" charset="0"/>
+                <a:ea typeface="Inter" pitchFamily="34" charset="-122"/>
+                <a:cs typeface="Inter" pitchFamily="34" charset="-120"/>
               </a:rPr>
               <a:t>Relojes, joyas y bolsos discretos y de buena calidad. Conviene llevar un portafolio o una carpeta elegante para los documentos.</a:t>
             </a:r>
@@ -7321,9 +7321,9 @@
                 <a:solidFill>
                   <a:srgbClr val="08407C"/>
                 </a:solidFill>
-                <a:latin typeface="Arial" pitchFamily="34" charset="0"/>
-                <a:ea typeface="Arial" pitchFamily="34" charset="-122"/>
-                <a:cs typeface="Arial" pitchFamily="34" charset="-120"/>
+                <a:latin typeface="Inter" pitchFamily="34" charset="0"/>
+                <a:ea typeface="Inter" pitchFamily="34" charset="-122"/>
+                <a:cs typeface="Inter" pitchFamily="34" charset="-120"/>
               </a:rPr>
               <a:t>Estilo y actitud</a:t>
             </a:r>
@@ -7363,9 +7363,9 @@
                 <a:solidFill>
                   <a:srgbClr val="2E4258"/>
                 </a:solidFill>
-                <a:latin typeface="Arial" pitchFamily="34" charset="0"/>
-                <a:ea typeface="Arial" pitchFamily="34" charset="-122"/>
-                <a:cs typeface="Arial" pitchFamily="34" charset="-120"/>
+                <a:latin typeface="Inter" pitchFamily="34" charset="0"/>
+                <a:ea typeface="Inter" pitchFamily="34" charset="-122"/>
+                <a:cs typeface="Inter" pitchFamily="34" charset="-120"/>
               </a:rPr>
               <a:t>Apariencia ordenada y pulcra, sin estilos llamativos ni informales. Más allá del aspecto: seguridad, amabilidad y postura profesional.</a:t>
             </a:r>
@@ -7456,9 +7456,9 @@
                 <a:solidFill>
                   <a:srgbClr val="FFFFFF"/>
                 </a:solidFill>
-                <a:latin typeface="Arial" pitchFamily="34" charset="0"/>
-                <a:ea typeface="Arial" pitchFamily="34" charset="-122"/>
-                <a:cs typeface="Arial" pitchFamily="34" charset="-120"/>
+                <a:latin typeface="Inter" pitchFamily="34" charset="0"/>
+                <a:ea typeface="Inter" pitchFamily="34" charset="-122"/>
+                <a:cs typeface="Inter" pitchFamily="34" charset="-120"/>
               </a:rPr>
               <a:t>Los perfiles en redes sociales también son nuestra imagen.</a:t>
             </a:r>
@@ -7608,9 +7608,9 @@
                 <a:solidFill>
                   <a:srgbClr val="08407C"/>
                 </a:solidFill>
-                <a:latin typeface="Arial" pitchFamily="34" charset="0"/>
-                <a:ea typeface="Arial" pitchFamily="34" charset="-122"/>
-                <a:cs typeface="Arial" pitchFamily="34" charset="-120"/>
+                <a:latin typeface="Inter" pitchFamily="34" charset="0"/>
+                <a:ea typeface="Inter" pitchFamily="34" charset="-122"/>
+                <a:cs typeface="Inter" pitchFamily="34" charset="-120"/>
               </a:rPr>
               <a:t>Sistematizar el proceso</a:t>
             </a:r>
@@ -7647,9 +7647,9 @@
                 <a:solidFill>
                   <a:srgbClr val="6A7686"/>
                 </a:solidFill>
-                <a:latin typeface="Arial" pitchFamily="34" charset="0"/>
-                <a:ea typeface="Arial" pitchFamily="34" charset="-122"/>
-                <a:cs typeface="Arial" pitchFamily="34" charset="-120"/>
+                <a:latin typeface="Inter" pitchFamily="34" charset="0"/>
+                <a:ea typeface="Inter" pitchFamily="34" charset="-122"/>
+                <a:cs typeface="Inter" pitchFamily="34" charset="-120"/>
               </a:rPr>
               <a:t>¿Cómo calificar a los contactos?</a:t>
             </a:r>
@@ -7713,9 +7713,9 @@
                 <a:solidFill>
                   <a:srgbClr val="FFFFFF"/>
                 </a:solidFill>
-                <a:latin typeface="Arial" pitchFamily="34" charset="0"/>
-                <a:ea typeface="Arial" pitchFamily="34" charset="-122"/>
-                <a:cs typeface="Arial" pitchFamily="34" charset="-120"/>
+                <a:latin typeface="Inter" pitchFamily="34" charset="0"/>
+                <a:ea typeface="Inter" pitchFamily="34" charset="-122"/>
+                <a:cs typeface="Inter" pitchFamily="34" charset="-120"/>
               </a:rPr>
               <a:t>No se puede mejorar ni escalar lo que no se puede medir.</a:t>
             </a:r>
@@ -7764,11 +7764,11 @@
             </a:avLst>
           </a:prstGeom>
           <a:solidFill>
-            <a:srgbClr val="F2F4F7"/>
+            <a:srgbClr val="F3F3F3"/>
           </a:solidFill>
           <a:ln w="12700">
             <a:solidFill>
-              <a:srgbClr val="F2F4F7"/>
+              <a:srgbClr val="F3F3F3"/>
             </a:solidFill>
             <a:prstDash val="solid"/>
           </a:ln>
@@ -7803,9 +7803,9 @@
                 <a:solidFill>
                   <a:srgbClr val="08407C"/>
                 </a:solidFill>
-                <a:latin typeface="Arial" pitchFamily="34" charset="0"/>
-                <a:ea typeface="Arial" pitchFamily="34" charset="-122"/>
-                <a:cs typeface="Arial" pitchFamily="34" charset="-120"/>
+                <a:latin typeface="Inter" pitchFamily="34" charset="0"/>
+                <a:ea typeface="Inter" pitchFamily="34" charset="-122"/>
+                <a:cs typeface="Inter" pitchFamily="34" charset="-120"/>
               </a:rPr>
               <a:t>Tipo</a:t>
             </a:r>
@@ -7845,9 +7845,9 @@
                 <a:solidFill>
                   <a:srgbClr val="2E4258"/>
                 </a:solidFill>
-                <a:latin typeface="Arial" pitchFamily="34" charset="0"/>
-                <a:ea typeface="Arial" pitchFamily="34" charset="-122"/>
-                <a:cs typeface="Arial" pitchFamily="34" charset="-120"/>
+                <a:latin typeface="Inter" pitchFamily="34" charset="0"/>
+                <a:ea typeface="Inter" pitchFamily="34" charset="-122"/>
+                <a:cs typeface="Inter" pitchFamily="34" charset="-120"/>
               </a:rPr>
               <a:t>Amigo es el valor base: todos arrancan ahí. Después, familiar, profesional y colega.</a:t>
             </a:r>
@@ -7872,11 +7872,11 @@
             </a:avLst>
           </a:prstGeom>
           <a:solidFill>
-            <a:srgbClr val="F2F4F7"/>
+            <a:srgbClr val="F3F3F3"/>
           </a:solidFill>
           <a:ln w="12700">
             <a:solidFill>
-              <a:srgbClr val="F2F4F7"/>
+              <a:srgbClr val="F3F3F3"/>
             </a:solidFill>
             <a:prstDash val="solid"/>
           </a:ln>
@@ -7911,9 +7911,9 @@
                 <a:solidFill>
                   <a:srgbClr val="08407C"/>
                 </a:solidFill>
-                <a:latin typeface="Arial" pitchFamily="34" charset="0"/>
-                <a:ea typeface="Arial" pitchFamily="34" charset="-122"/>
-                <a:cs typeface="Arial" pitchFamily="34" charset="-120"/>
+                <a:latin typeface="Inter" pitchFamily="34" charset="0"/>
+                <a:ea typeface="Inter" pitchFamily="34" charset="-122"/>
+                <a:cs typeface="Inter" pitchFamily="34" charset="-120"/>
               </a:rPr>
               <a:t>Relación de conocimiento</a:t>
             </a:r>
@@ -7953,9 +7953,9 @@
                 <a:solidFill>
                   <a:srgbClr val="2E4258"/>
                 </a:solidFill>
-                <a:latin typeface="Arial" pitchFamily="34" charset="0"/>
-                <a:ea typeface="Arial" pitchFamily="34" charset="-122"/>
-                <a:cs typeface="Arial" pitchFamily="34" charset="-120"/>
+                <a:latin typeface="Inter" pitchFamily="34" charset="0"/>
+                <a:ea typeface="Inter" pitchFamily="34" charset="-122"/>
+                <a:cs typeface="Inter" pitchFamily="34" charset="-120"/>
               </a:rPr>
               <a:t>Aprendiz o mentor. Comprende la relación de valor entre las partes.</a:t>
             </a:r>
@@ -7980,11 +7980,11 @@
             </a:avLst>
           </a:prstGeom>
           <a:solidFill>
-            <a:srgbClr val="F2F4F7"/>
+            <a:srgbClr val="F3F3F3"/>
           </a:solidFill>
           <a:ln w="12700">
             <a:solidFill>
-              <a:srgbClr val="F2F4F7"/>
+              <a:srgbClr val="F3F3F3"/>
             </a:solidFill>
             <a:prstDash val="solid"/>
           </a:ln>
@@ -8019,9 +8019,9 @@
                 <a:solidFill>
                   <a:srgbClr val="08407C"/>
                 </a:solidFill>
-                <a:latin typeface="Arial" pitchFamily="34" charset="0"/>
-                <a:ea typeface="Arial" pitchFamily="34" charset="-122"/>
-                <a:cs typeface="Arial" pitchFamily="34" charset="-120"/>
+                <a:latin typeface="Inter" pitchFamily="34" charset="0"/>
+                <a:ea typeface="Inter" pitchFamily="34" charset="-122"/>
+                <a:cs typeface="Inter" pitchFamily="34" charset="-120"/>
               </a:rPr>
               <a:t>¿Qué tan cercano?</a:t>
             </a:r>
@@ -8061,9 +8061,9 @@
                 <a:solidFill>
                   <a:srgbClr val="2E4258"/>
                 </a:solidFill>
-                <a:latin typeface="Arial" pitchFamily="34" charset="0"/>
-                <a:ea typeface="Arial" pitchFamily="34" charset="-122"/>
-                <a:cs typeface="Arial" pitchFamily="34" charset="-120"/>
+                <a:latin typeface="Inter" pitchFamily="34" charset="0"/>
+                <a:ea typeface="Inter" pitchFamily="34" charset="-122"/>
+                <a:cs typeface="Inter" pitchFamily="34" charset="-120"/>
               </a:rPr>
               <a:t>Define el tono de la comunicación y dónde hay que trabajar.</a:t>
             </a:r>
@@ -8088,11 +8088,11 @@
             </a:avLst>
           </a:prstGeom>
           <a:solidFill>
-            <a:srgbClr val="F2F4F7"/>
+            <a:srgbClr val="F3F3F3"/>
           </a:solidFill>
           <a:ln w="12700">
             <a:solidFill>
-              <a:srgbClr val="F2F4F7"/>
+              <a:srgbClr val="F3F3F3"/>
             </a:solidFill>
             <a:prstDash val="solid"/>
           </a:ln>
@@ -8127,9 +8127,9 @@
                 <a:solidFill>
                   <a:srgbClr val="08407C"/>
                 </a:solidFill>
-                <a:latin typeface="Arial" pitchFamily="34" charset="0"/>
-                <a:ea typeface="Arial" pitchFamily="34" charset="-122"/>
-                <a:cs typeface="Arial" pitchFamily="34" charset="-120"/>
+                <a:latin typeface="Inter" pitchFamily="34" charset="0"/>
+                <a:ea typeface="Inter" pitchFamily="34" charset="-122"/>
+                <a:cs typeface="Inter" pitchFamily="34" charset="-120"/>
               </a:rPr>
               <a:t>Probable acción</a:t>
             </a:r>
@@ -8169,9 +8169,9 @@
                 <a:solidFill>
                   <a:srgbClr val="2E4258"/>
                 </a:solidFill>
-                <a:latin typeface="Arial" pitchFamily="34" charset="0"/>
-                <a:ea typeface="Arial" pitchFamily="34" charset="-122"/>
-                <a:cs typeface="Arial" pitchFamily="34" charset="-120"/>
+                <a:latin typeface="Inter" pitchFamily="34" charset="0"/>
+                <a:ea typeface="Inter" pitchFamily="34" charset="-122"/>
+                <a:cs typeface="Inter" pitchFamily="34" charset="-120"/>
               </a:rPr>
               <a:t>Te recomienda siempre · solo si se lo pedís · aún no te recomendaría.</a:t>
             </a:r>
